--- a/천문_자동화_파이프라인.pptx
+++ b/천문_자동화_파이프라인.pptx
@@ -1677,45 +1677,6 @@
           </a:p>
         </p:txBody>
       </p:sp>
-      <p:sp>
-        <p:nvSpPr>
-          <p:cNvPr id="7" name="Text 5"/>
-          <p:cNvSpPr/>
-          <p:nvPr/>
-        </p:nvSpPr>
-        <p:spPr>
-          <a:xfrm>
-            <a:off x="0" y="6126480"/>
-            <a:ext cx="12191695" cy="0"/>
-          </a:xfrm>
-          <a:prstGeom prst="rect">
-            <a:avLst/>
-          </a:prstGeom>
-          <a:noFill/>
-          <a:ln/>
-        </p:spPr>
-        <p:txBody>
-          <a:bodyPr wrap="square" rtlCol="0" anchor="ctr"/>
-          <a:lstStyle/>
-          <a:p>
-            <a:pPr algn="ctr" indent="0" marL="0">
-              <a:buNone/>
-            </a:pPr>
-            <a:r>
-              <a:rPr lang="en-US" sz="1200" dirty="0">
-                <a:solidFill>
-                  <a:srgbClr val="5A5A6E"/>
-                </a:solidFill>
-                <a:latin typeface="Malgun Gothic" pitchFamily="34" charset="0"/>
-                <a:ea typeface="Malgun Gothic" pitchFamily="34" charset="-122"/>
-                <a:cs typeface="Malgun Gothic" pitchFamily="34" charset="-120"/>
-              </a:rPr>
-              <a:t>부속자료  ·  2026. 05. 31.</a:t>
-            </a:r>
-            <a:endParaRPr lang="en-US" sz="1200" dirty="0"/>
-          </a:p>
-        </p:txBody>
-      </p:sp>
     </p:spTree>
   </p:cSld>
   <p:clrMapOvr>
@@ -1859,7 +1820,7 @@
                 <a:ea typeface="Malgun Gothic" pitchFamily="34" charset="-122"/>
                 <a:cs typeface="Malgun Gothic" pitchFamily="34" charset="-120"/>
               </a:rPr>
-              <a:t>자동화 파이프라인</a:t>
+              <a:t>천문(天文) · 발표자료 자동화 파이프라인</a:t>
             </a:r>
             <a:endParaRPr lang="en-US" sz="1000" dirty="0"/>
           </a:p>
@@ -2998,7 +2959,7 @@
                 <a:ea typeface="Malgun Gothic" pitchFamily="34" charset="-122"/>
                 <a:cs typeface="Malgun Gothic" pitchFamily="34" charset="-120"/>
               </a:rPr>
-              <a:t>자동화 파이프라인</a:t>
+              <a:t>천문(天文) · 발표자료 자동화 파이프라인</a:t>
             </a:r>
             <a:endParaRPr lang="en-US" sz="1000" dirty="0"/>
           </a:p>
@@ -3322,7 +3283,7 @@
         <p:spPr>
           <a:xfrm>
             <a:off x="7040880" y="2194560"/>
-            <a:ext cx="4572000" cy="4206240"/>
+            <a:ext cx="4572000" cy="3931920"/>
           </a:xfrm>
           <a:prstGeom prst="rect">
             <a:avLst/>
@@ -3339,10 +3300,10 @@
                 <a:spcPct val="112000"/>
               </a:lnSpc>
               <a:spcBef>
-                <a:spcPts val="400"/>
+                <a:spcPts val="600"/>
               </a:spcBef>
               <a:spcAft>
-                <a:spcPts val="1000"/>
+                <a:spcPts val="1100"/>
               </a:spcAft>
               <a:buSzPct val="100000"/>
               <a:buChar char="▪"/>
@@ -3366,7 +3327,7 @@
                 <a:spcPct val="112000"/>
               </a:lnSpc>
               <a:spcAft>
-                <a:spcPts val="1000"/>
+                <a:spcPts val="1100"/>
               </a:spcAft>
               <a:buSzPct val="100000"/>
               <a:buChar char="▪"/>
@@ -3390,7 +3351,7 @@
                 <a:spcPct val="112000"/>
               </a:lnSpc>
               <a:spcAft>
-                <a:spcPts val="1000"/>
+                <a:spcPts val="1100"/>
               </a:spcAft>
               <a:buSzPct val="100000"/>
               <a:buChar char="▪"/>
@@ -3414,7 +3375,7 @@
                 <a:spcPct val="112000"/>
               </a:lnSpc>
               <a:spcAft>
-                <a:spcPts val="1000"/>
+                <a:spcPts val="1100"/>
               </a:spcAft>
               <a:buSzPct val="100000"/>
               <a:buChar char="▪"/>
@@ -3438,7 +3399,7 @@
                 <a:spcPct val="112000"/>
               </a:lnSpc>
               <a:spcAft>
-                <a:spcPts val="1000"/>
+                <a:spcPts val="1100"/>
               </a:spcAft>
               <a:buSzPct val="100000"/>
               <a:buChar char="▪"/>
@@ -3702,7 +3663,7 @@
                 <a:ea typeface="Malgun Gothic" pitchFamily="34" charset="-122"/>
                 <a:cs typeface="Malgun Gothic" pitchFamily="34" charset="-120"/>
               </a:rPr>
-              <a:t>자동화 파이프라인</a:t>
+              <a:t>천문(天文) · 발표자료 자동화 파이프라인</a:t>
             </a:r>
             <a:endParaRPr lang="en-US" sz="1000" dirty="0"/>
           </a:p>
@@ -3779,7 +3740,7 @@
         <p:spPr>
           <a:xfrm>
             <a:off x="640080" y="2057400"/>
-            <a:ext cx="6400800" cy="4206240"/>
+            <a:ext cx="6400800" cy="3931920"/>
           </a:xfrm>
           <a:prstGeom prst="rect">
             <a:avLst/>
@@ -3796,10 +3757,10 @@
                 <a:spcPct val="112000"/>
               </a:lnSpc>
               <a:spcBef>
-                <a:spcPts val="400"/>
+                <a:spcPts val="600"/>
               </a:spcBef>
               <a:spcAft>
-                <a:spcPts val="1000"/>
+                <a:spcPts val="1100"/>
               </a:spcAft>
               <a:buSzPct val="100000"/>
               <a:buChar char="▪"/>
@@ -3823,7 +3784,7 @@
                 <a:spcPct val="112000"/>
               </a:lnSpc>
               <a:spcAft>
-                <a:spcPts val="1000"/>
+                <a:spcPts val="1100"/>
               </a:spcAft>
               <a:buSzPct val="100000"/>
               <a:buChar char="▪"/>
@@ -3847,7 +3808,7 @@
                 <a:spcPct val="112000"/>
               </a:lnSpc>
               <a:spcAft>
-                <a:spcPts val="1000"/>
+                <a:spcPts val="1100"/>
               </a:spcAft>
               <a:buSzPct val="100000"/>
               <a:buChar char="▪"/>
@@ -3871,7 +3832,7 @@
                 <a:spcPct val="112000"/>
               </a:lnSpc>
               <a:spcAft>
-                <a:spcPts val="1000"/>
+                <a:spcPts val="1100"/>
               </a:spcAft>
               <a:buSzPct val="100000"/>
               <a:buChar char="▪"/>
@@ -3895,7 +3856,7 @@
                 <a:spcPct val="112000"/>
               </a:lnSpc>
               <a:spcAft>
-                <a:spcPts val="1000"/>
+                <a:spcPts val="1100"/>
               </a:spcAft>
               <a:buSzPct val="100000"/>
               <a:buChar char="▪"/>
@@ -3919,7 +3880,7 @@
                 <a:spcPct val="112000"/>
               </a:lnSpc>
               <a:spcAft>
-                <a:spcPts val="1000"/>
+                <a:spcPts val="1100"/>
               </a:spcAft>
               <a:buSzPct val="100000"/>
               <a:buChar char="▪"/>
@@ -3948,11 +3909,11 @@
         <p:spPr>
           <a:xfrm>
             <a:off x="7315200" y="2057400"/>
-            <a:ext cx="4297680" cy="2926080"/>
+            <a:ext cx="4297680" cy="2743200"/>
           </a:xfrm>
           <a:prstGeom prst="roundRect">
             <a:avLst>
-              <a:gd name="adj" fmla="val 1563"/>
+              <a:gd name="adj" fmla="val 1667"/>
             </a:avLst>
           </a:prstGeom>
           <a:solidFill>
@@ -3975,7 +3936,7 @@
         <p:spPr>
           <a:xfrm>
             <a:off x="7498080" y="2194560"/>
-            <a:ext cx="3931920" cy="2651760"/>
+            <a:ext cx="3931920" cy="2468880"/>
           </a:xfrm>
           <a:prstGeom prst="rect">
             <a:avLst/>
@@ -3999,7 +3960,7 @@
                 <a:ea typeface="Consolas" pitchFamily="34" charset="-122"/>
                 <a:cs typeface="Consolas" pitchFamily="34" charset="-120"/>
               </a:rPr>
-              <a:t>// scripts/capture-screens.mjs (요약)
+              <a:t>// scripts/deck/capture-kit.mjs (요약)
 </a:t>
             </a:r>
             <a:endParaRPr lang="en-US" sz="1150" dirty="0"/>
@@ -4017,7 +3978,7 @@
                 <a:ea typeface="Consolas" pitchFamily="34" charset="-122"/>
                 <a:cs typeface="Consolas" pitchFamily="34" charset="-120"/>
               </a:rPr>
-              <a:t>const b = await chromium.launch(
+              <a:t>const b = await launchEdge();
 </a:t>
             </a:r>
             <a:endParaRPr lang="en-US" sz="1150" dirty="0"/>
@@ -4035,7 +3996,7 @@
                 <a:ea typeface="Consolas" pitchFamily="34" charset="-122"/>
                 <a:cs typeface="Consolas" pitchFamily="34" charset="-120"/>
               </a:rPr>
-              <a:t>  { channel:'msedge', headless:true });
+              <a:t>const ctx = await mobileContext(b,
 </a:t>
             </a:r>
             <a:endParaRPr lang="en-US" sz="1150" dirty="0"/>
@@ -4053,7 +4014,7 @@
                 <a:ea typeface="Consolas" pitchFamily="34" charset="-122"/>
                 <a:cs typeface="Consolas" pitchFamily="34" charset="-120"/>
               </a:rPr>
-              <a:t>await ctx.addInitScript(seed); // 생일 주입
+              <a:t>  { seed, geo });   // 생일·위치 주입
 </a:t>
             </a:r>
             <a:endParaRPr lang="en-US" sz="1150" dirty="0"/>
@@ -4089,7 +4050,7 @@
                 <a:ea typeface="Consolas" pitchFamily="34" charset="-122"/>
                 <a:cs typeface="Consolas" pitchFamily="34" charset="-120"/>
               </a:rPr>
-              <a:t>await flipCard(page);   // 카드 뒤집기
+              <a:t>await flip(page);   // 카드 뒤집기
 </a:t>
             </a:r>
             <a:endParaRPr lang="en-US" sz="1150" dirty="0"/>
@@ -4107,25 +4068,7 @@
                 <a:ea typeface="Consolas" pitchFamily="34" charset="-122"/>
                 <a:cs typeface="Consolas" pitchFamily="34" charset="-120"/>
               </a:rPr>
-              <a:t>await page.screenshot(
-</a:t>
-            </a:r>
-            <a:endParaRPr lang="en-US" sz="1150" dirty="0"/>
-          </a:p>
-          <a:p>
-            <a:pPr indent="0" marL="0">
-              <a:buNone/>
-            </a:pPr>
-            <a:r>
-              <a:rPr lang="en-US" sz="1150" dirty="0">
-                <a:solidFill>
-                  <a:srgbClr val="D7E0F5"/>
-                </a:solidFill>
-                <a:latin typeface="Consolas" pitchFamily="34" charset="0"/>
-                <a:ea typeface="Consolas" pitchFamily="34" charset="-122"/>
-                <a:cs typeface="Consolas" pitchFamily="34" charset="-120"/>
-              </a:rPr>
-              <a:t>  { path:'screenshots/26_food_back.png' });
+              <a:t>await shot(page, '26_food_back');
 </a:t>
             </a:r>
             <a:endParaRPr lang="en-US" sz="1150" dirty="0"/>
@@ -4376,7 +4319,7 @@
                 <a:ea typeface="Malgun Gothic" pitchFamily="34" charset="-122"/>
                 <a:cs typeface="Malgun Gothic" pitchFamily="34" charset="-120"/>
               </a:rPr>
-              <a:t>자동화 파이프라인</a:t>
+              <a:t>천문(天文) · 발표자료 자동화 파이프라인</a:t>
             </a:r>
             <a:endParaRPr lang="en-US" sz="1000" dirty="0"/>
           </a:p>
@@ -4851,7 +4794,7 @@
                 <a:ea typeface="Malgun Gothic" pitchFamily="34" charset="-122"/>
                 <a:cs typeface="Malgun Gothic" pitchFamily="34" charset="-120"/>
               </a:rPr>
-              <a:t>자동화 파이프라인</a:t>
+              <a:t>천문(天文) · 발표자료 자동화 파이프라인</a:t>
             </a:r>
             <a:endParaRPr lang="en-US" sz="1000" dirty="0"/>
           </a:p>
@@ -4928,7 +4871,7 @@
         <p:spPr>
           <a:xfrm>
             <a:off x="640080" y="2057400"/>
-            <a:ext cx="6400800" cy="4206240"/>
+            <a:ext cx="6400800" cy="3931920"/>
           </a:xfrm>
           <a:prstGeom prst="rect">
             <a:avLst/>
@@ -4945,10 +4888,10 @@
                 <a:spcPct val="112000"/>
               </a:lnSpc>
               <a:spcBef>
-                <a:spcPts val="400"/>
+                <a:spcPts val="600"/>
               </a:spcBef>
               <a:spcAft>
-                <a:spcPts val="1000"/>
+                <a:spcPts val="1100"/>
               </a:spcAft>
               <a:buSzPct val="100000"/>
               <a:buChar char="▪"/>
@@ -4972,7 +4915,7 @@
                 <a:spcPct val="112000"/>
               </a:lnSpc>
               <a:spcAft>
-                <a:spcPts val="1000"/>
+                <a:spcPts val="1100"/>
               </a:spcAft>
               <a:buSzPct val="100000"/>
               <a:buChar char="▪"/>
@@ -4996,7 +4939,7 @@
                 <a:spcPct val="112000"/>
               </a:lnSpc>
               <a:spcAft>
-                <a:spcPts val="1000"/>
+                <a:spcPts val="1100"/>
               </a:spcAft>
               <a:buSzPct val="100000"/>
               <a:buChar char="▪"/>
@@ -5010,7 +4953,7 @@
                 <a:ea typeface="Malgun Gothic" pitchFamily="34" charset="-122"/>
                 <a:cs typeface="Malgun Gothic" pitchFamily="34" charset="-120"/>
               </a:rPr>
-              <a:t>대본(제목·요약·발표 노트)은 스크립트 내 데이터로 관리</a:t>
+              <a:t>엔진과 내용 분리: deck/(범용 엔진) ↔ build-*.mjs(천문 대본)</a:t>
             </a:r>
             <a:endParaRPr lang="en-US" sz="1550" dirty="0"/>
           </a:p>
@@ -5020,7 +4963,7 @@
                 <a:spcPct val="112000"/>
               </a:lnSpc>
               <a:spcAft>
-                <a:spcPts val="1000"/>
+                <a:spcPts val="1100"/>
               </a:spcAft>
               <a:buSzPct val="100000"/>
               <a:buChar char="▪"/>
@@ -5044,7 +4987,7 @@
                 <a:spcPct val="112000"/>
               </a:lnSpc>
               <a:spcAft>
-                <a:spcPts val="1000"/>
+                <a:spcPts val="1100"/>
               </a:spcAft>
               <a:buSzPct val="100000"/>
               <a:buChar char="▪"/>
@@ -5142,7 +5085,7 @@
                 <a:ea typeface="Consolas" pitchFamily="34" charset="-122"/>
                 <a:cs typeface="Consolas" pitchFamily="34" charset="-120"/>
               </a:rPr>
-              <a:t>const S = [ { no:6, title:'사주 카드',
+              <a:t>import { newDeck, makeKit }
 </a:t>
             </a:r>
             <a:endParaRPr lang="en-US" sz="1150" dirty="0"/>
@@ -5160,7 +5103,7 @@
                 <a:ea typeface="Consolas" pitchFamily="34" charset="-122"/>
                 <a:cs typeface="Consolas" pitchFamily="34" charset="-120"/>
               </a:rPr>
-              <a:t>  images:['13_card_front.png'],
+              <a:t>  from './deck/pptx-kit.mjs';
 </a:t>
             </a:r>
             <a:endParaRPr lang="en-US" sz="1150" dirty="0"/>
@@ -5178,7 +5121,7 @@
                 <a:ea typeface="Consolas" pitchFamily="34" charset="-122"/>
                 <a:cs typeface="Consolas" pitchFamily="34" charset="-120"/>
               </a:rPr>
-              <a:t>  bullets:['직접 펼쳐보는 …'] }, … ];
+              <a:t>const K = makeKit(pptx, {...});
 </a:t>
             </a:r>
             <a:endParaRPr lang="en-US" sz="1150" dirty="0"/>
@@ -5214,7 +5157,7 @@
                 <a:ea typeface="Consolas" pitchFamily="34" charset="-122"/>
                 <a:cs typeface="Consolas" pitchFamily="34" charset="-120"/>
               </a:rPr>
-              <a:t>  content(pptx.addSlide(), c);
+              <a:t>  K.content(pptx.addSlide(), c);
 </a:t>
             </a:r>
             <a:endParaRPr lang="en-US" sz="1150" dirty="0"/>
@@ -5462,7 +5405,7 @@
                 <a:ea typeface="Malgun Gothic" pitchFamily="34" charset="-122"/>
                 <a:cs typeface="Malgun Gothic" pitchFamily="34" charset="-120"/>
               </a:rPr>
-              <a:t>효과</a:t>
+              <a:t>재사용</a:t>
             </a:r>
             <a:endParaRPr lang="en-US" sz="1200" dirty="0"/>
           </a:p>
@@ -5501,7 +5444,7 @@
                 <a:ea typeface="Malgun Gothic" pitchFamily="34" charset="-122"/>
                 <a:cs typeface="Malgun Gothic" pitchFamily="34" charset="-120"/>
               </a:rPr>
-              <a:t>자동화 파이프라인</a:t>
+              <a:t>천문(天文) · 발표자료 자동화 파이프라인</a:t>
             </a:r>
             <a:endParaRPr lang="en-US" sz="1000" dirty="0"/>
           </a:p>
@@ -5563,7 +5506,7 @@
                 <a:ea typeface="Malgun Gothic" pitchFamily="34" charset="-122"/>
                 <a:cs typeface="Malgun Gothic" pitchFamily="34" charset="-120"/>
               </a:rPr>
-              <a:t>기능이 바뀌어도 항상 최신</a:t>
+              <a:t>다른 프로젝트로 추출</a:t>
             </a:r>
             <a:endParaRPr lang="en-US" sz="2500" dirty="0"/>
           </a:p>
@@ -5578,7 +5521,7 @@
         <p:spPr>
           <a:xfrm>
             <a:off x="640080" y="2057400"/>
-            <a:ext cx="7589520" cy="4206240"/>
+            <a:ext cx="7589520" cy="3931920"/>
           </a:xfrm>
           <a:prstGeom prst="rect">
             <a:avLst/>
@@ -5595,10 +5538,10 @@
                 <a:spcPct val="112000"/>
               </a:lnSpc>
               <a:spcBef>
-                <a:spcPts val="400"/>
+                <a:spcPts val="600"/>
               </a:spcBef>
               <a:spcAft>
-                <a:spcPts val="1000"/>
+                <a:spcPts val="1100"/>
               </a:spcAft>
               <a:buSzPct val="100000"/>
               <a:buChar char="▪"/>
@@ -5612,7 +5555,7 @@
                 <a:ea typeface="Malgun Gothic" pitchFamily="34" charset="-122"/>
                 <a:cs typeface="Malgun Gothic" pitchFamily="34" charset="-120"/>
               </a:rPr>
-              <a:t>화면 UI를 수정하면 `npm run deck` 한 번으로 발표자료 전체가 갱신</a:t>
+              <a:t>scripts/deck/ 폴더만 복사하면 엔진 이식 완료(프로젝트 의존 없음)</a:t>
             </a:r>
             <a:endParaRPr lang="en-US" sz="1600" dirty="0"/>
           </a:p>
@@ -5622,7 +5565,7 @@
                 <a:spcPct val="112000"/>
               </a:lnSpc>
               <a:spcAft>
-                <a:spcPts val="1000"/>
+                <a:spcPts val="1100"/>
               </a:spcAft>
               <a:buSzPct val="100000"/>
               <a:buChar char="▪"/>
@@ -5636,7 +5579,7 @@
                 <a:ea typeface="Malgun Gothic" pitchFamily="34" charset="-122"/>
                 <a:cs typeface="Malgun Gothic" pitchFamily="34" charset="-120"/>
               </a:rPr>
-              <a:t>수작업 캡처·자르기·정렬이 사라져 휴먼 에러·노동 시간 제거</a:t>
+              <a:t>pptx-kit.mjs : 공문서 PPTX 빌더(표지·본문·코드박스·흐름도)</a:t>
             </a:r>
             <a:endParaRPr lang="en-US" sz="1600" dirty="0"/>
           </a:p>
@@ -5646,7 +5589,7 @@
                 <a:spcPct val="112000"/>
               </a:lnSpc>
               <a:spcAft>
-                <a:spcPts val="1000"/>
+                <a:spcPts val="1100"/>
               </a:spcAft>
               <a:buSzPct val="100000"/>
               <a:buChar char="▪"/>
@@ -5660,7 +5603,7 @@
                 <a:ea typeface="Malgun Gothic" pitchFamily="34" charset="-122"/>
                 <a:cs typeface="Malgun Gothic" pitchFamily="34" charset="-120"/>
               </a:rPr>
-              <a:t>캡처 누락 방지: 기능 목록을 코드가 순회하며 빠짐없이 촬영</a:t>
+              <a:t>capture-kit.mjs : 브라우저 실행·캡처·대기·플립 공통 헬퍼</a:t>
             </a:r>
             <a:endParaRPr lang="en-US" sz="1600" dirty="0"/>
           </a:p>
@@ -5670,7 +5613,7 @@
                 <a:spcPct val="112000"/>
               </a:lnSpc>
               <a:spcAft>
-                <a:spcPts val="1000"/>
+                <a:spcPts val="1100"/>
               </a:spcAft>
               <a:buSzPct val="100000"/>
               <a:buChar char="▪"/>
@@ -5684,7 +5627,7 @@
                 <a:ea typeface="Malgun Gothic" pitchFamily="34" charset="-122"/>
                 <a:cs typeface="Malgun Gothic" pitchFamily="34" charset="-120"/>
               </a:rPr>
-              <a:t>사용자 제공 실제 폰 캡처(비공개 기능 등)도 함께 임베드 가능</a:t>
+              <a:t>imgsize.mjs : 이미지 해상도 판별(외부 의존 0)</a:t>
             </a:r>
             <a:endParaRPr lang="en-US" sz="1600" dirty="0"/>
           </a:p>
@@ -5694,7 +5637,7 @@
                 <a:spcPct val="112000"/>
               </a:lnSpc>
               <a:spcAft>
-                <a:spcPts val="1000"/>
+                <a:spcPts val="1100"/>
               </a:spcAft>
               <a:buSzPct val="100000"/>
               <a:buChar char="▪"/>
@@ -5708,7 +5651,7 @@
                 <a:ea typeface="Malgun Gothic" pitchFamily="34" charset="-122"/>
                 <a:cs typeface="Malgun Gothic" pitchFamily="34" charset="-120"/>
               </a:rPr>
-              <a:t>동일 스크립트로 배포본·로컬 어느 환경이든 동일 결과 재현</a:t>
+              <a:t>새 프로젝트는 셀렉터·대본만 새로 작성 → 즉시 발표자료 자동화</a:t>
             </a:r>
             <a:endParaRPr lang="en-US" sz="1600" dirty="0"/>
           </a:p>
@@ -5730,7 +5673,7 @@
         </p:blipFill>
         <p:spPr>
           <a:xfrm>
-            <a:off x="7680960" y="4023360"/>
+            <a:off x="7680960" y="4114800"/>
             <a:ext cx="3931920" cy="1371216"/>
           </a:xfrm>
           <a:prstGeom prst="rect">
@@ -5753,7 +5696,7 @@
         </p:nvSpPr>
         <p:spPr>
           <a:xfrm>
-            <a:off x="7680960" y="5440296"/>
+            <a:off x="7680960" y="5531736"/>
             <a:ext cx="3931920" cy="0"/>
           </a:xfrm>
           <a:prstGeom prst="rect">

--- a/천문_자동화_파이프라인.pptx
+++ b/천문_자동화_파이프라인.pptx
@@ -4403,7 +4403,7 @@
         </p:blipFill>
         <p:spPr>
           <a:xfrm>
-            <a:off x="1923985" y="2011680"/>
+            <a:off x="5190042" y="2011680"/>
             <a:ext cx="1811611" cy="4023360"/>
           </a:xfrm>
           <a:prstGeom prst="rect">
@@ -4418,102 +4418,9 @@
           </a:effectLst>
         </p:spPr>
       </p:pic>
-      <p:pic>
-        <p:nvPicPr>
-          <p:cNvPr id="8" name="Image 1" descr="screenshots/13_card_front.png">    </p:cNvPr>
-          <p:cNvPicPr>
-            <a:picLocks noChangeAspect="1"/>
-          </p:cNvPicPr>
-          <p:nvPr/>
-        </p:nvPicPr>
-        <p:blipFill>
-          <a:blip r:embed="rId2"/>
-          <a:stretch>
-            <a:fillRect/>
-          </a:stretch>
-        </p:blipFill>
-        <p:spPr>
-          <a:xfrm>
-            <a:off x="4101356" y="2011680"/>
-            <a:ext cx="1811611" cy="4023360"/>
-          </a:xfrm>
-          <a:prstGeom prst="rect">
-            <a:avLst/>
-          </a:prstGeom>
-          <a:effectLst>
-            <a:outerShdw sx="100000" sy="100000" kx="0" ky="0" algn="bl" rotWithShape="0" blurRad="76200" dist="25400" dir="5400000">
-              <a:srgbClr val="9AA3B2">
-                <a:alpha val="40000"/>
-              </a:srgbClr>
-            </a:outerShdw>
-          </a:effectLst>
-        </p:spPr>
-      </p:pic>
-      <p:pic>
-        <p:nvPicPr>
-          <p:cNvPr id="9" name="Image 2" descr="screenshots/14_card_back.png">    </p:cNvPr>
-          <p:cNvPicPr>
-            <a:picLocks noChangeAspect="1"/>
-          </p:cNvPicPr>
-          <p:nvPr/>
-        </p:nvPicPr>
-        <p:blipFill>
-          <a:blip r:embed="rId3"/>
-          <a:stretch>
-            <a:fillRect/>
-          </a:stretch>
-        </p:blipFill>
-        <p:spPr>
-          <a:xfrm>
-            <a:off x="6278728" y="2011680"/>
-            <a:ext cx="1811611" cy="4023360"/>
-          </a:xfrm>
-          <a:prstGeom prst="rect">
-            <a:avLst/>
-          </a:prstGeom>
-          <a:effectLst>
-            <a:outerShdw sx="100000" sy="100000" kx="0" ky="0" algn="bl" rotWithShape="0" blurRad="76200" dist="25400" dir="5400000">
-              <a:srgbClr val="9AA3B2">
-                <a:alpha val="40000"/>
-              </a:srgbClr>
-            </a:outerShdw>
-          </a:effectLst>
-        </p:spPr>
-      </p:pic>
-      <p:pic>
-        <p:nvPicPr>
-          <p:cNvPr id="10" name="Image 3" descr="screenshots/24_tarot_result.png">    </p:cNvPr>
-          <p:cNvPicPr>
-            <a:picLocks noChangeAspect="1"/>
-          </p:cNvPicPr>
-          <p:nvPr/>
-        </p:nvPicPr>
-        <p:blipFill>
-          <a:blip r:embed="rId4"/>
-          <a:stretch>
-            <a:fillRect/>
-          </a:stretch>
-        </p:blipFill>
-        <p:spPr>
-          <a:xfrm>
-            <a:off x="8456099" y="2011680"/>
-            <a:ext cx="1811611" cy="4023360"/>
-          </a:xfrm>
-          <a:prstGeom prst="rect">
-            <a:avLst/>
-          </a:prstGeom>
-          <a:effectLst>
-            <a:outerShdw sx="100000" sy="100000" kx="0" ky="0" algn="bl" rotWithShape="0" blurRad="76200" dist="25400" dir="5400000">
-              <a:srgbClr val="9AA3B2">
-                <a:alpha val="40000"/>
-              </a:srgbClr>
-            </a:outerShdw>
-          </a:effectLst>
-        </p:spPr>
-      </p:pic>
-      <p:sp>
-        <p:nvSpPr>
-          <p:cNvPr id="11" name="Text 5"/>
+      <p:sp>
+        <p:nvSpPr>
+          <p:cNvPr id="8" name="Text 5"/>
           <p:cNvSpPr/>
           <p:nvPr/>
         </p:nvSpPr>
@@ -4552,7 +4459,7 @@
       </p:sp>
       <p:sp>
         <p:nvSpPr>
-          <p:cNvPr id="12" name="Shape 6"/>
+          <p:cNvPr id="9" name="Shape 6"/>
           <p:cNvSpPr/>
           <p:nvPr/>
         </p:nvSpPr>
@@ -4575,7 +4482,7 @@
       </p:sp>
       <p:sp>
         <p:nvSpPr>
-          <p:cNvPr id="13" name="Text 7"/>
+          <p:cNvPr id="10" name="Text 7"/>
           <p:cNvSpPr/>
           <p:nvPr/>
         </p:nvSpPr>
@@ -4614,7 +4521,7 @@
       </p:sp>
       <p:sp>
         <p:nvSpPr>
-          <p:cNvPr id="14" name="Text 8"/>
+          <p:cNvPr id="11" name="Text 8"/>
           <p:cNvSpPr/>
           <p:nvPr/>
         </p:nvSpPr>
@@ -5657,79 +5564,9 @@
           </a:p>
         </p:txBody>
       </p:sp>
-      <p:pic>
-        <p:nvPicPr>
-          <p:cNvPr id="8" name="Image 0" descr="screenshots/u_terminal.png">    </p:cNvPr>
-          <p:cNvPicPr>
-            <a:picLocks noChangeAspect="1"/>
-          </p:cNvPicPr>
-          <p:nvPr/>
-        </p:nvPicPr>
-        <p:blipFill>
-          <a:blip r:embed="rId1"/>
-          <a:stretch>
-            <a:fillRect/>
-          </a:stretch>
-        </p:blipFill>
-        <p:spPr>
-          <a:xfrm>
-            <a:off x="7680960" y="4114800"/>
-            <a:ext cx="3931920" cy="1371216"/>
-          </a:xfrm>
-          <a:prstGeom prst="rect">
-            <a:avLst/>
-          </a:prstGeom>
-          <a:effectLst>
-            <a:outerShdw sx="100000" sy="100000" kx="0" ky="0" algn="bl" rotWithShape="0" blurRad="76200" dist="25400" dir="5400000">
-              <a:srgbClr val="9AA3B2">
-                <a:alpha val="40000"/>
-              </a:srgbClr>
-            </a:outerShdw>
-          </a:effectLst>
-        </p:spPr>
-      </p:pic>
-      <p:sp>
-        <p:nvSpPr>
-          <p:cNvPr id="9" name="Text 6"/>
-          <p:cNvSpPr/>
-          <p:nvPr/>
-        </p:nvSpPr>
-        <p:spPr>
-          <a:xfrm>
-            <a:off x="7680960" y="5531736"/>
-            <a:ext cx="3931920" cy="0"/>
-          </a:xfrm>
-          <a:prstGeom prst="rect">
-            <a:avLst/>
-          </a:prstGeom>
-          <a:noFill/>
-          <a:ln/>
-        </p:spPr>
-        <p:txBody>
-          <a:bodyPr wrap="square" rtlCol="0" anchor="ctr"/>
-          <a:lstStyle/>
-          <a:p>
-            <a:pPr algn="ctr" indent="0" marL="0">
-              <a:buNone/>
-            </a:pPr>
-            <a:r>
-              <a:rPr lang="en-US" sz="1000" dirty="0">
-                <a:solidFill>
-                  <a:srgbClr val="5A5A6E"/>
-                </a:solidFill>
-                <a:latin typeface="Malgun Gothic" pitchFamily="34" charset="0"/>
-                <a:ea typeface="Malgun Gothic" pitchFamily="34" charset="-122"/>
-                <a:cs typeface="Malgun Gothic" pitchFamily="34" charset="-120"/>
-              </a:rPr>
-              <a:t>실제 생성 로그</a:t>
-            </a:r>
-            <a:endParaRPr lang="en-US" sz="1000" dirty="0"/>
-          </a:p>
-        </p:txBody>
-      </p:sp>
-      <p:sp>
-        <p:nvSpPr>
-          <p:cNvPr id="10" name="Shape 7"/>
+      <p:sp>
+        <p:nvSpPr>
+          <p:cNvPr id="8" name="Shape 6"/>
           <p:cNvSpPr/>
           <p:nvPr/>
         </p:nvSpPr>
@@ -5752,7 +5589,7 @@
       </p:sp>
       <p:sp>
         <p:nvSpPr>
-          <p:cNvPr id="11" name="Text 8"/>
+          <p:cNvPr id="9" name="Text 7"/>
           <p:cNvSpPr/>
           <p:nvPr/>
         </p:nvSpPr>
@@ -5791,7 +5628,7 @@
       </p:sp>
       <p:sp>
         <p:nvSpPr>
-          <p:cNvPr id="12" name="Text 9"/>
+          <p:cNvPr id="10" name="Text 8"/>
           <p:cNvSpPr/>
           <p:nvPr/>
         </p:nvSpPr>
